--- a/output_pptx/Living_Hope.pptx
+++ b/output_pptx/Living_Hope.pptx
@@ -3120,8 +3120,8 @@
         </p:nvSpPr>
         <p:spPr>
           <a:xfrm>
-            <a:off x="594360" y="2258568"/>
-            <a:ext cx="11002975" cy="685800"/>
+            <a:off x="640080" y="2052828"/>
+            <a:ext cx="10911535" cy="731520"/>
           </a:xfrm>
           <a:prstGeom prst="rect">
             <a:avLst/>
@@ -3136,7 +3136,7 @@
           <a:p>
             <a:pPr algn="ctr"/>
             <a:r>
-              <a:rPr sz="3352" b="1" i="0">
+              <a:rPr sz="3600" b="1" i="0">
                 <a:solidFill>
                   <a:srgbClr val="FFFFFF"/>
                 </a:solidFill>
@@ -3155,8 +3155,8 @@
         </p:nvSpPr>
         <p:spPr>
           <a:xfrm>
-            <a:off x="594360" y="2980944"/>
-            <a:ext cx="11002975" cy="347472"/>
+            <a:off x="640080" y="2985516"/>
+            <a:ext cx="10911535" cy="731520"/>
           </a:xfrm>
           <a:prstGeom prst="rect">
             <a:avLst/>
@@ -3171,83 +3171,13 @@
           <a:p>
             <a:pPr algn="ctr"/>
             <a:r>
-              <a:rPr sz="2200" b="0" i="1">
-                <a:solidFill>
-                  <a:srgbClr val="8C8C8C"/>
-                </a:solidFill>
-                <a:latin typeface="Arial"/>
-              </a:rPr>
-              <a:t/>
-            </a:r>
-          </a:p>
-        </p:txBody>
-      </p:sp>
-      <p:sp>
-        <p:nvSpPr>
-          <p:cNvPr id="4" name="TextBox 3"/>
-          <p:cNvSpPr txBox="1"/>
-          <p:nvPr/>
-        </p:nvSpPr>
-        <p:spPr>
-          <a:xfrm>
-            <a:off x="594360" y="3529584"/>
-            <a:ext cx="11002975" cy="685800"/>
-          </a:xfrm>
-          <a:prstGeom prst="rect">
-            <a:avLst/>
-          </a:prstGeom>
-          <a:noFill/>
-        </p:spPr>
-        <p:txBody>
-          <a:bodyPr wrap="square">
-            <a:spAutoFit/>
-          </a:bodyPr>
-          <a:lstStyle/>
-          <a:p>
-            <a:pPr algn="ctr"/>
-            <a:r>
-              <a:rPr sz="3128" b="1" i="0">
+              <a:rPr sz="3400" b="1" i="0">
                 <a:solidFill>
                   <a:srgbClr val="FFFFFF"/>
                 </a:solidFill>
                 <a:latin typeface="Arial"/>
               </a:rPr>
               <a:t>Quão alta a montanha que eu não podia escalar</a:t>
-            </a:r>
-          </a:p>
-        </p:txBody>
-      </p:sp>
-      <p:sp>
-        <p:nvSpPr>
-          <p:cNvPr id="5" name="TextBox 4"/>
-          <p:cNvSpPr txBox="1"/>
-          <p:nvPr/>
-        </p:nvSpPr>
-        <p:spPr>
-          <a:xfrm>
-            <a:off x="594360" y="4251960"/>
-            <a:ext cx="11002975" cy="347472"/>
-          </a:xfrm>
-          <a:prstGeom prst="rect">
-            <a:avLst/>
-          </a:prstGeom>
-          <a:noFill/>
-        </p:spPr>
-        <p:txBody>
-          <a:bodyPr wrap="square">
-            <a:spAutoFit/>
-          </a:bodyPr>
-          <a:lstStyle/>
-          <a:p>
-            <a:pPr algn="ctr"/>
-            <a:r>
-              <a:rPr sz="2200" b="0" i="1">
-                <a:solidFill>
-                  <a:srgbClr val="8C8C8C"/>
-                </a:solidFill>
-                <a:latin typeface="Arial"/>
-              </a:rPr>
-              <a:t/>
             </a:r>
           </a:p>
         </p:txBody>
@@ -3286,8 +3216,8 @@
         </p:nvSpPr>
         <p:spPr>
           <a:xfrm>
-            <a:off x="594360" y="2894076"/>
-            <a:ext cx="11002975" cy="685800"/>
+            <a:off x="640080" y="2702052"/>
+            <a:ext cx="10911535" cy="731520"/>
           </a:xfrm>
           <a:prstGeom prst="rect">
             <a:avLst/>
@@ -3302,48 +3232,13 @@
           <a:p>
             <a:pPr algn="ctr"/>
             <a:r>
-              <a:rPr sz="4400" b="1" i="0">
+              <a:rPr sz="4800" b="1" i="0">
                 <a:solidFill>
                   <a:srgbClr val="FFFFFF"/>
                 </a:solidFill>
                 <a:latin typeface="Arial"/>
               </a:rPr>
               <a:t>A cruz falou, eu estou perdoado</a:t>
-            </a:r>
-          </a:p>
-        </p:txBody>
-      </p:sp>
-      <p:sp>
-        <p:nvSpPr>
-          <p:cNvPr id="3" name="TextBox 2"/>
-          <p:cNvSpPr txBox="1"/>
-          <p:nvPr/>
-        </p:nvSpPr>
-        <p:spPr>
-          <a:xfrm>
-            <a:off x="594360" y="3616452"/>
-            <a:ext cx="11002975" cy="347472"/>
-          </a:xfrm>
-          <a:prstGeom prst="rect">
-            <a:avLst/>
-          </a:prstGeom>
-          <a:noFill/>
-        </p:spPr>
-        <p:txBody>
-          <a:bodyPr wrap="square">
-            <a:spAutoFit/>
-          </a:bodyPr>
-          <a:lstStyle/>
-          <a:p>
-            <a:pPr algn="ctr"/>
-            <a:r>
-              <a:rPr sz="2200" b="0" i="1">
-                <a:solidFill>
-                  <a:srgbClr val="8C8C8C"/>
-                </a:solidFill>
-                <a:latin typeface="Arial"/>
-              </a:rPr>
-              <a:t/>
             </a:r>
           </a:p>
         </p:txBody>
@@ -3382,8 +3277,8 @@
         </p:nvSpPr>
         <p:spPr>
           <a:xfrm>
-            <a:off x="594360" y="1837944"/>
-            <a:ext cx="11002975" cy="685800"/>
+            <a:off x="640080" y="1650492"/>
+            <a:ext cx="10911535" cy="731520"/>
           </a:xfrm>
           <a:prstGeom prst="rect">
             <a:avLst/>
@@ -3398,7 +3293,7 @@
           <a:p>
             <a:pPr algn="ctr"/>
             <a:r>
-              <a:rPr sz="4400" b="1" i="0">
+              <a:rPr sz="4800" b="1" i="0">
                 <a:solidFill>
                   <a:srgbClr val="FFFFFF"/>
                 </a:solidFill>
@@ -3417,8 +3312,8 @@
         </p:nvSpPr>
         <p:spPr>
           <a:xfrm>
-            <a:off x="594360" y="2560320"/>
-            <a:ext cx="11002975" cy="384048"/>
+            <a:off x="640080" y="2418588"/>
+            <a:ext cx="10911535" cy="365760"/>
           </a:xfrm>
           <a:prstGeom prst="rect">
             <a:avLst/>
@@ -3435,7 +3330,7 @@
             <a:r>
               <a:rPr sz="2400" b="0" i="1">
                 <a:solidFill>
-                  <a:srgbClr val="B4B4B4"/>
+                  <a:srgbClr val="AAAAAA"/>
                 </a:solidFill>
                 <a:latin typeface="Arial"/>
               </a:rPr>
@@ -3452,8 +3347,8 @@
         </p:nvSpPr>
         <p:spPr>
           <a:xfrm>
-            <a:off x="594360" y="2980944"/>
-            <a:ext cx="11002975" cy="347472"/>
+            <a:off x="640080" y="2985516"/>
+            <a:ext cx="10911535" cy="731520"/>
           </a:xfrm>
           <a:prstGeom prst="rect">
             <a:avLst/>
@@ -3468,13 +3363,13 @@
           <a:p>
             <a:pPr algn="ctr"/>
             <a:r>
-              <a:rPr sz="2000" b="0" i="1">
-                <a:solidFill>
-                  <a:srgbClr val="8C8C8C"/>
+              <a:rPr sz="4800" b="1" i="0">
+                <a:solidFill>
+                  <a:srgbClr val="FFFFFF"/>
                 </a:solidFill>
                 <a:latin typeface="Arial"/>
               </a:rPr>
-              <a:t/>
+              <a:t>ハレルヤ 自由与える</a:t>
             </a:r>
           </a:p>
         </p:txBody>
@@ -3487,8 +3382,8 @@
         </p:nvSpPr>
         <p:spPr>
           <a:xfrm>
-            <a:off x="594360" y="3529584"/>
-            <a:ext cx="11002975" cy="685800"/>
+            <a:off x="640080" y="3753612"/>
+            <a:ext cx="10911535" cy="365760"/>
           </a:xfrm>
           <a:prstGeom prst="rect">
             <a:avLst/>
@@ -3503,13 +3398,13 @@
           <a:p>
             <a:pPr algn="ctr"/>
             <a:r>
-              <a:rPr sz="4400" b="1" i="0">
-                <a:solidFill>
-                  <a:srgbClr val="FFFFFF"/>
+              <a:rPr sz="2400" b="0" i="1">
+                <a:solidFill>
+                  <a:srgbClr val="AAAAAA"/>
                 </a:solidFill>
                 <a:latin typeface="Arial"/>
               </a:rPr>
-              <a:t>ハレルヤ 自由与える</a:t>
+              <a:t>Hareruya Jiyuu Ataeru</a:t>
             </a:r>
           </a:p>
         </p:txBody>
@@ -3522,8 +3417,8 @@
         </p:nvSpPr>
         <p:spPr>
           <a:xfrm>
-            <a:off x="594360" y="4251960"/>
-            <a:ext cx="11002975" cy="384048"/>
+            <a:off x="640080" y="4530852"/>
+            <a:ext cx="10911535" cy="310896"/>
           </a:xfrm>
           <a:prstGeom prst="rect">
             <a:avLst/>
@@ -3538,13 +3433,13 @@
           <a:p>
             <a:pPr algn="ctr"/>
             <a:r>
-              <a:rPr sz="2400" b="0" i="1">
-                <a:solidFill>
-                  <a:srgbClr val="B4B4B4"/>
+              <a:rPr sz="2000" b="0" i="1">
+                <a:solidFill>
+                  <a:srgbClr val="828282"/>
                 </a:solidFill>
                 <a:latin typeface="Arial"/>
               </a:rPr>
-              <a:t>Hareruya Jiyuu Ataeru</a:t>
+              <a:t>Há salvação em seu nome</a:t>
             </a:r>
           </a:p>
         </p:txBody>
@@ -3557,8 +3452,8 @@
         </p:nvSpPr>
         <p:spPr>
           <a:xfrm>
-            <a:off x="594360" y="4672584"/>
-            <a:ext cx="11002975" cy="347472"/>
+            <a:off x="640080" y="4896612"/>
+            <a:ext cx="10911535" cy="310896"/>
           </a:xfrm>
           <a:prstGeom prst="rect">
             <a:avLst/>
@@ -3575,11 +3470,11 @@
             <a:r>
               <a:rPr sz="2000" b="0" i="1">
                 <a:solidFill>
-                  <a:srgbClr val="8C8C8C"/>
+                  <a:srgbClr val="828282"/>
                 </a:solidFill>
                 <a:latin typeface="Arial"/>
               </a:rPr>
-              <a:t/>
+              <a:t>Jesus Cristo, minha esperança viva</a:t>
             </a:r>
           </a:p>
         </p:txBody>
@@ -3618,8 +3513,8 @@
         </p:nvSpPr>
         <p:spPr>
           <a:xfrm>
-            <a:off x="594360" y="1837944"/>
-            <a:ext cx="11002975" cy="685800"/>
+            <a:off x="640080" y="1650492"/>
+            <a:ext cx="10911535" cy="731520"/>
           </a:xfrm>
           <a:prstGeom prst="rect">
             <a:avLst/>
@@ -3634,7 +3529,7 @@
           <a:p>
             <a:pPr algn="ctr"/>
             <a:r>
-              <a:rPr sz="4400" b="1" i="0">
+              <a:rPr sz="4800" b="1" i="0">
                 <a:solidFill>
                   <a:srgbClr val="FFFFFF"/>
                 </a:solidFill>
@@ -3653,8 +3548,8 @@
         </p:nvSpPr>
         <p:spPr>
           <a:xfrm>
-            <a:off x="594360" y="2560320"/>
-            <a:ext cx="11002975" cy="384048"/>
+            <a:off x="640080" y="2418588"/>
+            <a:ext cx="10911535" cy="365760"/>
           </a:xfrm>
           <a:prstGeom prst="rect">
             <a:avLst/>
@@ -3671,7 +3566,7 @@
             <a:r>
               <a:rPr sz="2400" b="0" i="1">
                 <a:solidFill>
-                  <a:srgbClr val="B4B4B4"/>
+                  <a:srgbClr val="AAAAAA"/>
                 </a:solidFill>
                 <a:latin typeface="Arial"/>
               </a:rPr>
@@ -3688,8 +3583,8 @@
         </p:nvSpPr>
         <p:spPr>
           <a:xfrm>
-            <a:off x="594360" y="2980944"/>
-            <a:ext cx="11002975" cy="347472"/>
+            <a:off x="640080" y="2985516"/>
+            <a:ext cx="10911535" cy="731520"/>
           </a:xfrm>
           <a:prstGeom prst="rect">
             <a:avLst/>
@@ -3704,13 +3599,13 @@
           <a:p>
             <a:pPr algn="ctr"/>
             <a:r>
-              <a:rPr sz="2000" b="0" i="1">
-                <a:solidFill>
-                  <a:srgbClr val="8C8C8C"/>
+              <a:rPr sz="4800" b="1" i="0">
+                <a:solidFill>
+                  <a:srgbClr val="FFFFFF"/>
                 </a:solidFill>
                 <a:latin typeface="Arial"/>
               </a:rPr>
-              <a:t/>
+              <a:t>主イエス　我が希望</a:t>
             </a:r>
           </a:p>
         </p:txBody>
@@ -3723,8 +3618,8 @@
         </p:nvSpPr>
         <p:spPr>
           <a:xfrm>
-            <a:off x="594360" y="3529584"/>
-            <a:ext cx="11002975" cy="685800"/>
+            <a:off x="640080" y="3753612"/>
+            <a:ext cx="10911535" cy="365760"/>
           </a:xfrm>
           <a:prstGeom prst="rect">
             <a:avLst/>
@@ -3739,13 +3634,13 @@
           <a:p>
             <a:pPr algn="ctr"/>
             <a:r>
-              <a:rPr sz="4400" b="1" i="0">
-                <a:solidFill>
-                  <a:srgbClr val="FFFFFF"/>
+              <a:rPr sz="2400" b="0" i="1">
+                <a:solidFill>
+                  <a:srgbClr val="AAAAAA"/>
                 </a:solidFill>
                 <a:latin typeface="Arial"/>
               </a:rPr>
-              <a:t>主イエス　我が希望</a:t>
+              <a:t>Shu Iesu Waga Kibou</a:t>
             </a:r>
           </a:p>
         </p:txBody>
@@ -3758,8 +3653,8 @@
         </p:nvSpPr>
         <p:spPr>
           <a:xfrm>
-            <a:off x="594360" y="4251960"/>
-            <a:ext cx="11002975" cy="384048"/>
+            <a:off x="640080" y="4530852"/>
+            <a:ext cx="10911535" cy="310896"/>
           </a:xfrm>
           <a:prstGeom prst="rect">
             <a:avLst/>
@@ -3774,13 +3669,13 @@
           <a:p>
             <a:pPr algn="ctr"/>
             <a:r>
-              <a:rPr sz="2400" b="0" i="1">
-                <a:solidFill>
-                  <a:srgbClr val="B4B4B4"/>
+              <a:rPr sz="2000" b="0" i="1">
+                <a:solidFill>
+                  <a:srgbClr val="828282"/>
                 </a:solidFill>
                 <a:latin typeface="Arial"/>
               </a:rPr>
-              <a:t>Shu Iesu Waga Kibou</a:t>
+              <a:t>O Deus de muitas eras desceu da glória</a:t>
             </a:r>
           </a:p>
         </p:txBody>
@@ -3793,8 +3688,8 @@
         </p:nvSpPr>
         <p:spPr>
           <a:xfrm>
-            <a:off x="594360" y="4672584"/>
-            <a:ext cx="11002975" cy="347472"/>
+            <a:off x="640080" y="4896612"/>
+            <a:ext cx="10911535" cy="310896"/>
           </a:xfrm>
           <a:prstGeom prst="rect">
             <a:avLst/>
@@ -3811,11 +3706,11 @@
             <a:r>
               <a:rPr sz="2000" b="0" i="1">
                 <a:solidFill>
-                  <a:srgbClr val="8C8C8C"/>
+                  <a:srgbClr val="828282"/>
                 </a:solidFill>
                 <a:latin typeface="Arial"/>
               </a:rPr>
-              <a:t/>
+              <a:t>Para vestir meu pecado e suportar minha vergonha</a:t>
             </a:r>
           </a:p>
         </p:txBody>
@@ -3854,8 +3749,8 @@
         </p:nvSpPr>
         <p:spPr>
           <a:xfrm>
-            <a:off x="594360" y="1837944"/>
-            <a:ext cx="11002975" cy="685800"/>
+            <a:off x="640080" y="1650492"/>
+            <a:ext cx="10911535" cy="731520"/>
           </a:xfrm>
           <a:prstGeom prst="rect">
             <a:avLst/>
@@ -3870,7 +3765,7 @@
           <a:p>
             <a:pPr algn="ctr"/>
             <a:r>
-              <a:rPr sz="4400" b="1" i="0">
+              <a:rPr sz="4800" b="1" i="0">
                 <a:solidFill>
                   <a:srgbClr val="FFFFFF"/>
                 </a:solidFill>
@@ -3889,8 +3784,8 @@
         </p:nvSpPr>
         <p:spPr>
           <a:xfrm>
-            <a:off x="594360" y="2560320"/>
-            <a:ext cx="11002975" cy="384048"/>
+            <a:off x="640080" y="2418588"/>
+            <a:ext cx="10911535" cy="365760"/>
           </a:xfrm>
           <a:prstGeom prst="rect">
             <a:avLst/>
@@ -3907,7 +3802,7 @@
             <a:r>
               <a:rPr sz="2400" b="0" i="1">
                 <a:solidFill>
-                  <a:srgbClr val="B4B4B4"/>
+                  <a:srgbClr val="AAAAAA"/>
                 </a:solidFill>
                 <a:latin typeface="Arial"/>
               </a:rPr>
@@ -3924,8 +3819,8 @@
         </p:nvSpPr>
         <p:spPr>
           <a:xfrm>
-            <a:off x="594360" y="2980944"/>
-            <a:ext cx="11002975" cy="347472"/>
+            <a:off x="640080" y="2985516"/>
+            <a:ext cx="10911535" cy="731520"/>
           </a:xfrm>
           <a:prstGeom prst="rect">
             <a:avLst/>
@@ -3940,13 +3835,13 @@
           <a:p>
             <a:pPr algn="ctr"/>
             <a:r>
-              <a:rPr sz="2000" b="0" i="1">
-                <a:solidFill>
-                  <a:srgbClr val="8C8C8C"/>
+              <a:rPr sz="4800" b="1" i="0">
+                <a:solidFill>
+                  <a:srgbClr val="FFFFFF"/>
                 </a:solidFill>
                 <a:latin typeface="Arial"/>
               </a:rPr>
-              <a:t/>
+              <a:t>沈黙は打ち消された　死に打ち勝った</a:t>
             </a:r>
           </a:p>
         </p:txBody>
@@ -3959,8 +3854,8 @@
         </p:nvSpPr>
         <p:spPr>
           <a:xfrm>
-            <a:off x="594360" y="3529584"/>
-            <a:ext cx="11002975" cy="685800"/>
+            <a:off x="640080" y="3753612"/>
+            <a:ext cx="10911535" cy="365760"/>
           </a:xfrm>
           <a:prstGeom prst="rect">
             <a:avLst/>
@@ -3975,13 +3870,13 @@
           <a:p>
             <a:pPr algn="ctr"/>
             <a:r>
-              <a:rPr sz="4400" b="1" i="0">
-                <a:solidFill>
-                  <a:srgbClr val="FFFFFF"/>
+              <a:rPr sz="2400" b="0" i="1">
+                <a:solidFill>
+                  <a:srgbClr val="AAAAAA"/>
                 </a:solidFill>
                 <a:latin typeface="Arial"/>
               </a:rPr>
-              <a:t>沈黙は打ち消された　死に打ち勝った</a:t>
+              <a:t>Chinmokuha Uchikesareta  Shini Uchikatta</a:t>
             </a:r>
           </a:p>
         </p:txBody>
@@ -3994,8 +3889,8 @@
         </p:nvSpPr>
         <p:spPr>
           <a:xfrm>
-            <a:off x="594360" y="4251960"/>
-            <a:ext cx="11002975" cy="384048"/>
+            <a:off x="640080" y="4530852"/>
+            <a:ext cx="10911535" cy="310896"/>
           </a:xfrm>
           <a:prstGeom prst="rect">
             <a:avLst/>
@@ -4010,13 +3905,13 @@
           <a:p>
             <a:pPr algn="ctr"/>
             <a:r>
-              <a:rPr sz="2400" b="0" i="1">
-                <a:solidFill>
-                  <a:srgbClr val="B4B4B4"/>
+              <a:rPr sz="2000" b="0" i="1">
+                <a:solidFill>
+                  <a:srgbClr val="828282"/>
                 </a:solidFill>
                 <a:latin typeface="Arial"/>
               </a:rPr>
-              <a:t>Chinmokuha Uchikesareta  Shini Uchikatta</a:t>
+              <a:t>Belo Salvador, eu sou seu para sempre</a:t>
             </a:r>
           </a:p>
         </p:txBody>
@@ -4029,8 +3924,8 @@
         </p:nvSpPr>
         <p:spPr>
           <a:xfrm>
-            <a:off x="594360" y="4672584"/>
-            <a:ext cx="11002975" cy="347472"/>
+            <a:off x="640080" y="4896612"/>
+            <a:ext cx="10911535" cy="310896"/>
           </a:xfrm>
           <a:prstGeom prst="rect">
             <a:avLst/>
@@ -4047,11 +3942,11 @@
             <a:r>
               <a:rPr sz="2000" b="0" i="1">
                 <a:solidFill>
-                  <a:srgbClr val="8C8C8C"/>
+                  <a:srgbClr val="828282"/>
                 </a:solidFill>
                 <a:latin typeface="Arial"/>
               </a:rPr>
-              <a:t/>
+              <a:t>Aleluia, louve Aquele que me libertou</a:t>
             </a:r>
           </a:p>
         </p:txBody>
@@ -4090,8 +3985,8 @@
         </p:nvSpPr>
         <p:spPr>
           <a:xfrm>
-            <a:off x="594360" y="2258568"/>
-            <a:ext cx="11002975" cy="685800"/>
+            <a:off x="640080" y="2052828"/>
+            <a:ext cx="10911535" cy="731520"/>
           </a:xfrm>
           <a:prstGeom prst="rect">
             <a:avLst/>
@@ -4106,7 +4001,7 @@
           <a:p>
             <a:pPr algn="ctr"/>
             <a:r>
-              <a:rPr sz="3805" b="1" i="0">
+              <a:rPr sz="4100" b="1" i="0">
                 <a:solidFill>
                   <a:srgbClr val="FFFFFF"/>
                 </a:solidFill>
@@ -4125,8 +4020,8 @@
         </p:nvSpPr>
         <p:spPr>
           <a:xfrm>
-            <a:off x="594360" y="2980944"/>
-            <a:ext cx="11002975" cy="347472"/>
+            <a:off x="640080" y="2985516"/>
+            <a:ext cx="10911535" cy="731520"/>
           </a:xfrm>
           <a:prstGeom prst="rect">
             <a:avLst/>
@@ -4141,13 +4036,13 @@
           <a:p>
             <a:pPr algn="ctr"/>
             <a:r>
-              <a:rPr sz="2200" b="0" i="1">
-                <a:solidFill>
-                  <a:srgbClr val="8C8C8C"/>
+              <a:rPr sz="4100" b="1" i="0">
+                <a:solidFill>
+                  <a:srgbClr val="FFFFFF"/>
                 </a:solidFill>
                 <a:latin typeface="Arial"/>
               </a:rPr>
-              <a:t/>
+              <a:t>Aleluia, louve Aquele que me libertou</a:t>
             </a:r>
           </a:p>
         </p:txBody>
@@ -4160,8 +4055,8 @@
         </p:nvSpPr>
         <p:spPr>
           <a:xfrm>
-            <a:off x="594360" y="3529584"/>
-            <a:ext cx="11002975" cy="685800"/>
+            <a:off x="640080" y="4128516"/>
+            <a:ext cx="10911535" cy="310896"/>
           </a:xfrm>
           <a:prstGeom prst="rect">
             <a:avLst/>
@@ -4176,13 +4071,13 @@
           <a:p>
             <a:pPr algn="ctr"/>
             <a:r>
-              <a:rPr sz="3805" b="1" i="0">
-                <a:solidFill>
-                  <a:srgbClr val="FFFFFF"/>
+              <a:rPr sz="2000" b="0" i="0">
+                <a:solidFill>
+                  <a:srgbClr val="828282"/>
                 </a:solidFill>
                 <a:latin typeface="Arial"/>
               </a:rPr>
-              <a:t>Aleluia, louve Aquele que me libertou</a:t>
+              <a:t>約束の朝が来る　主はよみがえられた</a:t>
             </a:r>
           </a:p>
         </p:txBody>
@@ -4195,8 +4090,8 @@
         </p:nvSpPr>
         <p:spPr>
           <a:xfrm>
-            <a:off x="594360" y="4251960"/>
-            <a:ext cx="11002975" cy="347472"/>
+            <a:off x="640080" y="4494276"/>
+            <a:ext cx="10911535" cy="310896"/>
           </a:xfrm>
           <a:prstGeom prst="rect">
             <a:avLst/>
@@ -4211,13 +4106,13 @@
           <a:p>
             <a:pPr algn="ctr"/>
             <a:r>
-              <a:rPr sz="2200" b="0" i="1">
-                <a:solidFill>
-                  <a:srgbClr val="8C8C8C"/>
+              <a:rPr sz="2000" b="0" i="0">
+                <a:solidFill>
+                  <a:srgbClr val="828282"/>
                 </a:solidFill>
                 <a:latin typeface="Arial"/>
               </a:rPr>
-              <a:t/>
+              <a:t>沈黙は打ち消された　死に打ち勝った</a:t>
             </a:r>
           </a:p>
         </p:txBody>
@@ -4256,8 +4151,8 @@
         </p:nvSpPr>
         <p:spPr>
           <a:xfrm>
-            <a:off x="594360" y="2258568"/>
-            <a:ext cx="11002975" cy="685800"/>
+            <a:off x="640080" y="2052828"/>
+            <a:ext cx="10911535" cy="731520"/>
           </a:xfrm>
           <a:prstGeom prst="rect">
             <a:avLst/>
@@ -4272,7 +4167,7 @@
           <a:p>
             <a:pPr algn="ctr"/>
             <a:r>
-              <a:rPr sz="3200" b="1" i="0">
+              <a:rPr sz="3400" b="1" i="0">
                 <a:solidFill>
                   <a:srgbClr val="FFFFFF"/>
                 </a:solidFill>
@@ -4291,8 +4186,8 @@
         </p:nvSpPr>
         <p:spPr>
           <a:xfrm>
-            <a:off x="594360" y="2980944"/>
-            <a:ext cx="11002975" cy="347472"/>
+            <a:off x="640080" y="2985516"/>
+            <a:ext cx="10911535" cy="731520"/>
           </a:xfrm>
           <a:prstGeom prst="rect">
             <a:avLst/>
@@ -4307,83 +4202,13 @@
           <a:p>
             <a:pPr algn="ctr"/>
             <a:r>
-              <a:rPr sz="2200" b="0" i="1">
-                <a:solidFill>
-                  <a:srgbClr val="8C8C8C"/>
-                </a:solidFill>
-                <a:latin typeface="Arial"/>
-              </a:rPr>
-              <a:t/>
-            </a:r>
-          </a:p>
-        </p:txBody>
-      </p:sp>
-      <p:sp>
-        <p:nvSpPr>
-          <p:cNvPr id="4" name="TextBox 3"/>
-          <p:cNvSpPr txBox="1"/>
-          <p:nvPr/>
-        </p:nvSpPr>
-        <p:spPr>
-          <a:xfrm>
-            <a:off x="594360" y="3529584"/>
-            <a:ext cx="11002975" cy="685800"/>
-          </a:xfrm>
-          <a:prstGeom prst="rect">
-            <a:avLst/>
-          </a:prstGeom>
-          <a:noFill/>
-        </p:spPr>
-        <p:txBody>
-          <a:bodyPr wrap="square">
-            <a:spAutoFit/>
-          </a:bodyPr>
-          <a:lstStyle/>
-          <a:p>
-            <a:pPr algn="ctr"/>
-            <a:r>
-              <a:rPr sz="4400" b="1" i="0">
+              <a:rPr sz="4800" b="1" i="0">
                 <a:solidFill>
                   <a:srgbClr val="FFFFFF"/>
                 </a:solidFill>
                 <a:latin typeface="Arial"/>
               </a:rPr>
               <a:t>Você quebrou todas as cadeias</a:t>
-            </a:r>
-          </a:p>
-        </p:txBody>
-      </p:sp>
-      <p:sp>
-        <p:nvSpPr>
-          <p:cNvPr id="5" name="TextBox 4"/>
-          <p:cNvSpPr txBox="1"/>
-          <p:nvPr/>
-        </p:nvSpPr>
-        <p:spPr>
-          <a:xfrm>
-            <a:off x="594360" y="4251960"/>
-            <a:ext cx="11002975" cy="347472"/>
-          </a:xfrm>
-          <a:prstGeom prst="rect">
-            <a:avLst/>
-          </a:prstGeom>
-          <a:noFill/>
-        </p:spPr>
-        <p:txBody>
-          <a:bodyPr wrap="square">
-            <a:spAutoFit/>
-          </a:bodyPr>
-          <a:lstStyle/>
-          <a:p>
-            <a:pPr algn="ctr"/>
-            <a:r>
-              <a:rPr sz="2200" b="0" i="1">
-                <a:solidFill>
-                  <a:srgbClr val="8C8C8C"/>
-                </a:solidFill>
-                <a:latin typeface="Arial"/>
-              </a:rPr>
-              <a:t/>
             </a:r>
           </a:p>
         </p:txBody>
@@ -4422,8 +4247,8 @@
         </p:nvSpPr>
         <p:spPr>
           <a:xfrm>
-            <a:off x="594360" y="2894076"/>
-            <a:ext cx="11002975" cy="685800"/>
+            <a:off x="640080" y="2702052"/>
+            <a:ext cx="10911535" cy="731520"/>
           </a:xfrm>
           <a:prstGeom prst="rect">
             <a:avLst/>
@@ -4438,48 +4263,13 @@
           <a:p>
             <a:pPr algn="ctr"/>
             <a:r>
-              <a:rPr sz="4400" b="1" i="0">
+              <a:rPr sz="4800" b="1" i="0">
                 <a:solidFill>
                   <a:srgbClr val="FFFFFF"/>
                 </a:solidFill>
                 <a:latin typeface="Arial"/>
               </a:rPr>
               <a:t>Há salvação em seu nome</a:t>
-            </a:r>
-          </a:p>
-        </p:txBody>
-      </p:sp>
-      <p:sp>
-        <p:nvSpPr>
-          <p:cNvPr id="3" name="TextBox 2"/>
-          <p:cNvSpPr txBox="1"/>
-          <p:nvPr/>
-        </p:nvSpPr>
-        <p:spPr>
-          <a:xfrm>
-            <a:off x="594360" y="3616452"/>
-            <a:ext cx="11002975" cy="347472"/>
-          </a:xfrm>
-          <a:prstGeom prst="rect">
-            <a:avLst/>
-          </a:prstGeom>
-          <a:noFill/>
-        </p:spPr>
-        <p:txBody>
-          <a:bodyPr wrap="square">
-            <a:spAutoFit/>
-          </a:bodyPr>
-          <a:lstStyle/>
-          <a:p>
-            <a:pPr algn="ctr"/>
-            <a:r>
-              <a:rPr sz="2200" b="0" i="1">
-                <a:solidFill>
-                  <a:srgbClr val="8C8C8C"/>
-                </a:solidFill>
-                <a:latin typeface="Arial"/>
-              </a:rPr>
-              <a:t/>
             </a:r>
           </a:p>
         </p:txBody>
@@ -4518,8 +4308,8 @@
         </p:nvSpPr>
         <p:spPr>
           <a:xfrm>
-            <a:off x="594360" y="2258568"/>
-            <a:ext cx="11002975" cy="685800"/>
+            <a:off x="640080" y="2052828"/>
+            <a:ext cx="10911535" cy="731520"/>
           </a:xfrm>
           <a:prstGeom prst="rect">
             <a:avLst/>
@@ -4534,7 +4324,7 @@
           <a:p>
             <a:pPr algn="ctr"/>
             <a:r>
-              <a:rPr sz="4141" b="1" i="0">
+              <a:rPr sz="4500" b="1" i="0">
                 <a:solidFill>
                   <a:srgbClr val="FFFFFF"/>
                 </a:solidFill>
@@ -4553,8 +4343,8 @@
         </p:nvSpPr>
         <p:spPr>
           <a:xfrm>
-            <a:off x="594360" y="2980944"/>
-            <a:ext cx="11002975" cy="347472"/>
+            <a:off x="640080" y="2985516"/>
+            <a:ext cx="10911535" cy="731520"/>
           </a:xfrm>
           <a:prstGeom prst="rect">
             <a:avLst/>
@@ -4569,83 +4359,13 @@
           <a:p>
             <a:pPr algn="ctr"/>
             <a:r>
-              <a:rPr sz="2200" b="0" i="1">
-                <a:solidFill>
-                  <a:srgbClr val="8C8C8C"/>
-                </a:solidFill>
-                <a:latin typeface="Arial"/>
-              </a:rPr>
-              <a:t/>
-            </a:r>
-          </a:p>
-        </p:txBody>
-      </p:sp>
-      <p:sp>
-        <p:nvSpPr>
-          <p:cNvPr id="4" name="TextBox 3"/>
-          <p:cNvSpPr txBox="1"/>
-          <p:nvPr/>
-        </p:nvSpPr>
-        <p:spPr>
-          <a:xfrm>
-            <a:off x="594360" y="3529584"/>
-            <a:ext cx="11002975" cy="685800"/>
-          </a:xfrm>
-          <a:prstGeom prst="rect">
-            <a:avLst/>
-          </a:prstGeom>
-          <a:noFill/>
-        </p:spPr>
-        <p:txBody>
-          <a:bodyPr wrap="square">
-            <a:spAutoFit/>
-          </a:bodyPr>
-          <a:lstStyle/>
-          <a:p>
-            <a:pPr algn="ctr"/>
-            <a:r>
-              <a:rPr sz="3610" b="1" i="0">
+              <a:rPr sz="3900" b="1" i="0">
                 <a:solidFill>
                   <a:srgbClr val="FFFFFF"/>
                 </a:solidFill>
                 <a:latin typeface="Arial"/>
               </a:rPr>
               <a:t>Então veio a manhã que selou a promessa</a:t>
-            </a:r>
-          </a:p>
-        </p:txBody>
-      </p:sp>
-      <p:sp>
-        <p:nvSpPr>
-          <p:cNvPr id="5" name="TextBox 4"/>
-          <p:cNvSpPr txBox="1"/>
-          <p:nvPr/>
-        </p:nvSpPr>
-        <p:spPr>
-          <a:xfrm>
-            <a:off x="594360" y="4251960"/>
-            <a:ext cx="11002975" cy="347472"/>
-          </a:xfrm>
-          <a:prstGeom prst="rect">
-            <a:avLst/>
-          </a:prstGeom>
-          <a:noFill/>
-        </p:spPr>
-        <p:txBody>
-          <a:bodyPr wrap="square">
-            <a:spAutoFit/>
-          </a:bodyPr>
-          <a:lstStyle/>
-          <a:p>
-            <a:pPr algn="ctr"/>
-            <a:r>
-              <a:rPr sz="2200" b="0" i="1">
-                <a:solidFill>
-                  <a:srgbClr val="8C8C8C"/>
-                </a:solidFill>
-                <a:latin typeface="Arial"/>
-              </a:rPr>
-              <a:t/>
             </a:r>
           </a:p>
         </p:txBody>
@@ -4684,8 +4404,8 @@
         </p:nvSpPr>
         <p:spPr>
           <a:xfrm>
-            <a:off x="594360" y="2258568"/>
-            <a:ext cx="11002975" cy="685800"/>
+            <a:off x="640080" y="2052828"/>
+            <a:ext cx="10911535" cy="731520"/>
           </a:xfrm>
           <a:prstGeom prst="rect">
             <a:avLst/>
@@ -4700,7 +4420,7 @@
           <a:p>
             <a:pPr algn="ctr"/>
             <a:r>
-              <a:rPr sz="4266" b="1" i="0">
+              <a:rPr sz="4600" b="1" i="0">
                 <a:solidFill>
                   <a:srgbClr val="FFFFFF"/>
                 </a:solidFill>
@@ -4719,8 +4439,8 @@
         </p:nvSpPr>
         <p:spPr>
           <a:xfrm>
-            <a:off x="594360" y="2980944"/>
-            <a:ext cx="11002975" cy="347472"/>
+            <a:off x="640080" y="2985516"/>
+            <a:ext cx="10911535" cy="731520"/>
           </a:xfrm>
           <a:prstGeom prst="rect">
             <a:avLst/>
@@ -4735,83 +4455,13 @@
           <a:p>
             <a:pPr algn="ctr"/>
             <a:r>
-              <a:rPr sz="2200" b="0" i="1">
-                <a:solidFill>
-                  <a:srgbClr val="8C8C8C"/>
-                </a:solidFill>
-                <a:latin typeface="Arial"/>
-              </a:rPr>
-              <a:t/>
-            </a:r>
-          </a:p>
-        </p:txBody>
-      </p:sp>
-      <p:sp>
-        <p:nvSpPr>
-          <p:cNvPr id="4" name="TextBox 3"/>
-          <p:cNvSpPr txBox="1"/>
-          <p:nvPr/>
-        </p:nvSpPr>
-        <p:spPr>
-          <a:xfrm>
-            <a:off x="594360" y="3529584"/>
-            <a:ext cx="11002975" cy="685800"/>
-          </a:xfrm>
-          <a:prstGeom prst="rect">
-            <a:avLst/>
-          </a:prstGeom>
-          <a:noFill/>
-        </p:spPr>
-        <p:txBody>
-          <a:bodyPr wrap="square">
-            <a:spAutoFit/>
-          </a:bodyPr>
-          <a:lstStyle/>
-          <a:p>
-            <a:pPr algn="ctr"/>
-            <a:r>
-              <a:rPr sz="4400" b="1" i="0">
+              <a:rPr sz="4800" b="1" i="0">
                 <a:solidFill>
                   <a:srgbClr val="FFFFFF"/>
                 </a:solidFill>
                 <a:latin typeface="Arial"/>
               </a:rPr>
               <a:t>E falei Seu nome na noite</a:t>
-            </a:r>
-          </a:p>
-        </p:txBody>
-      </p:sp>
-      <p:sp>
-        <p:nvSpPr>
-          <p:cNvPr id="5" name="TextBox 4"/>
-          <p:cNvSpPr txBox="1"/>
-          <p:nvPr/>
-        </p:nvSpPr>
-        <p:spPr>
-          <a:xfrm>
-            <a:off x="594360" y="4251960"/>
-            <a:ext cx="11002975" cy="347472"/>
-          </a:xfrm>
-          <a:prstGeom prst="rect">
-            <a:avLst/>
-          </a:prstGeom>
-          <a:noFill/>
-        </p:spPr>
-        <p:txBody>
-          <a:bodyPr wrap="square">
-            <a:spAutoFit/>
-          </a:bodyPr>
-          <a:lstStyle/>
-          <a:p>
-            <a:pPr algn="ctr"/>
-            <a:r>
-              <a:rPr sz="2200" b="0" i="1">
-                <a:solidFill>
-                  <a:srgbClr val="8C8C8C"/>
-                </a:solidFill>
-                <a:latin typeface="Arial"/>
-              </a:rPr>
-              <a:t/>
             </a:r>
           </a:p>
         </p:txBody>
@@ -4850,8 +4500,8 @@
         </p:nvSpPr>
         <p:spPr>
           <a:xfrm>
-            <a:off x="594360" y="2258568"/>
-            <a:ext cx="11002975" cy="685800"/>
+            <a:off x="640080" y="2052828"/>
+            <a:ext cx="10911535" cy="731520"/>
           </a:xfrm>
           <a:prstGeom prst="rect">
             <a:avLst/>
@@ -4866,7 +4516,7 @@
           <a:p>
             <a:pPr algn="ctr"/>
             <a:r>
-              <a:rPr sz="2995" b="1" i="0">
+              <a:rPr sz="3200" b="1" i="0">
                 <a:solidFill>
                   <a:srgbClr val="FFFFFF"/>
                 </a:solidFill>
@@ -4885,8 +4535,8 @@
         </p:nvSpPr>
         <p:spPr>
           <a:xfrm>
-            <a:off x="594360" y="2980944"/>
-            <a:ext cx="11002975" cy="347472"/>
+            <a:off x="640080" y="2985516"/>
+            <a:ext cx="10911535" cy="731520"/>
           </a:xfrm>
           <a:prstGeom prst="rect">
             <a:avLst/>
@@ -4901,83 +4551,13 @@
           <a:p>
             <a:pPr algn="ctr"/>
             <a:r>
-              <a:rPr sz="2200" b="0" i="1">
-                <a:solidFill>
-                  <a:srgbClr val="8C8C8C"/>
-                </a:solidFill>
-                <a:latin typeface="Arial"/>
-              </a:rPr>
-              <a:t/>
-            </a:r>
-          </a:p>
-        </p:txBody>
-      </p:sp>
-      <p:sp>
-        <p:nvSpPr>
-          <p:cNvPr id="4" name="TextBox 3"/>
-          <p:cNvSpPr txBox="1"/>
-          <p:nvPr/>
-        </p:nvSpPr>
-        <p:spPr>
-          <a:xfrm>
-            <a:off x="594360" y="3529584"/>
-            <a:ext cx="11002975" cy="685800"/>
-          </a:xfrm>
-          <a:prstGeom prst="rect">
-            <a:avLst/>
-          </a:prstGeom>
-          <a:noFill/>
-        </p:spPr>
-        <p:txBody>
-          <a:bodyPr wrap="square">
-            <a:spAutoFit/>
-          </a:bodyPr>
-          <a:lstStyle/>
-          <a:p>
-            <a:pPr algn="ctr"/>
-            <a:r>
-              <a:rPr sz="4400" b="1" i="0">
+              <a:rPr sz="4800" b="1" i="0">
                 <a:solidFill>
                   <a:srgbClr val="FFFFFF"/>
                 </a:solidFill>
                 <a:latin typeface="Arial"/>
               </a:rPr>
               <a:t>Rasgou as sombras da minha alma</a:t>
-            </a:r>
-          </a:p>
-        </p:txBody>
-      </p:sp>
-      <p:sp>
-        <p:nvSpPr>
-          <p:cNvPr id="5" name="TextBox 4"/>
-          <p:cNvSpPr txBox="1"/>
-          <p:nvPr/>
-        </p:nvSpPr>
-        <p:spPr>
-          <a:xfrm>
-            <a:off x="594360" y="4251960"/>
-            <a:ext cx="11002975" cy="347472"/>
-          </a:xfrm>
-          <a:prstGeom prst="rect">
-            <a:avLst/>
-          </a:prstGeom>
-          <a:noFill/>
-        </p:spPr>
-        <p:txBody>
-          <a:bodyPr wrap="square">
-            <a:spAutoFit/>
-          </a:bodyPr>
-          <a:lstStyle/>
-          <a:p>
-            <a:pPr algn="ctr"/>
-            <a:r>
-              <a:rPr sz="2200" b="0" i="1">
-                <a:solidFill>
-                  <a:srgbClr val="8C8C8C"/>
-                </a:solidFill>
-                <a:latin typeface="Arial"/>
-              </a:rPr>
-              <a:t/>
             </a:r>
           </a:p>
         </p:txBody>
@@ -5016,8 +4596,8 @@
         </p:nvSpPr>
         <p:spPr>
           <a:xfrm>
-            <a:off x="594360" y="2258568"/>
-            <a:ext cx="11002975" cy="685800"/>
+            <a:off x="640080" y="2052828"/>
+            <a:ext cx="10911535" cy="731520"/>
           </a:xfrm>
           <a:prstGeom prst="rect">
             <a:avLst/>
@@ -5032,7 +4612,7 @@
           <a:p>
             <a:pPr algn="ctr"/>
             <a:r>
-              <a:rPr sz="3128" b="1" i="0">
+              <a:rPr sz="3400" b="1" i="0">
                 <a:solidFill>
                   <a:srgbClr val="FFFFFF"/>
                 </a:solidFill>
@@ -5051,8 +4631,8 @@
         </p:nvSpPr>
         <p:spPr>
           <a:xfrm>
-            <a:off x="594360" y="2980944"/>
-            <a:ext cx="11002975" cy="347472"/>
+            <a:off x="640080" y="2985516"/>
+            <a:ext cx="10911535" cy="731520"/>
           </a:xfrm>
           <a:prstGeom prst="rect">
             <a:avLst/>
@@ -5067,83 +4647,13 @@
           <a:p>
             <a:pPr algn="ctr"/>
             <a:r>
-              <a:rPr sz="2200" b="0" i="1">
-                <a:solidFill>
-                  <a:srgbClr val="8C8C8C"/>
-                </a:solidFill>
-                <a:latin typeface="Arial"/>
-              </a:rPr>
-              <a:t/>
-            </a:r>
-          </a:p>
-        </p:txBody>
-      </p:sp>
-      <p:sp>
-        <p:nvSpPr>
-          <p:cNvPr id="4" name="TextBox 3"/>
-          <p:cNvSpPr txBox="1"/>
-          <p:nvPr/>
-        </p:nvSpPr>
-        <p:spPr>
-          <a:xfrm>
-            <a:off x="594360" y="3529584"/>
-            <a:ext cx="11002975" cy="685800"/>
-          </a:xfrm>
-          <a:prstGeom prst="rect">
-            <a:avLst/>
-          </a:prstGeom>
-          <a:noFill/>
-        </p:spPr>
-        <p:txBody>
-          <a:bodyPr wrap="square">
-            <a:spAutoFit/>
-          </a:bodyPr>
-          <a:lstStyle/>
-          <a:p>
-            <a:pPr algn="ctr"/>
-            <a:r>
-              <a:rPr sz="4141" b="1" i="0">
+              <a:rPr sz="4500" b="1" i="0">
                 <a:solidFill>
                   <a:srgbClr val="FFFFFF"/>
                 </a:solidFill>
                 <a:latin typeface="Arial"/>
               </a:rPr>
               <a:t>Jesus Cristo, minha esperança viva</a:t>
-            </a:r>
-          </a:p>
-        </p:txBody>
-      </p:sp>
-      <p:sp>
-        <p:nvSpPr>
-          <p:cNvPr id="5" name="TextBox 4"/>
-          <p:cNvSpPr txBox="1"/>
-          <p:nvPr/>
-        </p:nvSpPr>
-        <p:spPr>
-          <a:xfrm>
-            <a:off x="594360" y="4251960"/>
-            <a:ext cx="11002975" cy="347472"/>
-          </a:xfrm>
-          <a:prstGeom prst="rect">
-            <a:avLst/>
-          </a:prstGeom>
-          <a:noFill/>
-        </p:spPr>
-        <p:txBody>
-          <a:bodyPr wrap="square">
-            <a:spAutoFit/>
-          </a:bodyPr>
-          <a:lstStyle/>
-          <a:p>
-            <a:pPr algn="ctr"/>
-            <a:r>
-              <a:rPr sz="2200" b="0" i="1">
-                <a:solidFill>
-                  <a:srgbClr val="8C8C8C"/>
-                </a:solidFill>
-                <a:latin typeface="Arial"/>
-              </a:rPr>
-              <a:t/>
             </a:r>
           </a:p>
         </p:txBody>
@@ -5182,8 +4692,8 @@
         </p:nvSpPr>
         <p:spPr>
           <a:xfrm>
-            <a:off x="594360" y="1837944"/>
-            <a:ext cx="11002975" cy="685800"/>
+            <a:off x="640080" y="1650492"/>
+            <a:ext cx="10911535" cy="731520"/>
           </a:xfrm>
           <a:prstGeom prst="rect">
             <a:avLst/>
@@ -5198,7 +4708,7 @@
           <a:p>
             <a:pPr algn="ctr"/>
             <a:r>
-              <a:rPr sz="4400" b="1" i="0">
+              <a:rPr sz="4800" b="1" i="0">
                 <a:solidFill>
                   <a:srgbClr val="FFFFFF"/>
                 </a:solidFill>
@@ -5217,8 +4727,8 @@
         </p:nvSpPr>
         <p:spPr>
           <a:xfrm>
-            <a:off x="594360" y="2560320"/>
-            <a:ext cx="11002975" cy="384048"/>
+            <a:off x="640080" y="2418588"/>
+            <a:ext cx="10911535" cy="365760"/>
           </a:xfrm>
           <a:prstGeom prst="rect">
             <a:avLst/>
@@ -5235,7 +4745,7 @@
             <a:r>
               <a:rPr sz="2400" b="0" i="1">
                 <a:solidFill>
-                  <a:srgbClr val="B4B4B4"/>
+                  <a:srgbClr val="AAAAAA"/>
                 </a:solidFill>
                 <a:latin typeface="Arial"/>
               </a:rPr>
@@ -5252,8 +4762,8 @@
         </p:nvSpPr>
         <p:spPr>
           <a:xfrm>
-            <a:off x="594360" y="2980944"/>
-            <a:ext cx="11002975" cy="347472"/>
+            <a:off x="640080" y="2985516"/>
+            <a:ext cx="10911535" cy="731520"/>
           </a:xfrm>
           <a:prstGeom prst="rect">
             <a:avLst/>
@@ -5268,13 +4778,13 @@
           <a:p>
             <a:pPr algn="ctr"/>
             <a:r>
-              <a:rPr sz="2000" b="0" i="1">
-                <a:solidFill>
-                  <a:srgbClr val="8C8C8C"/>
+              <a:rPr sz="4800" b="1" i="0">
+                <a:solidFill>
+                  <a:srgbClr val="FFFFFF"/>
                 </a:solidFill>
                 <a:latin typeface="Arial"/>
               </a:rPr>
-              <a:t/>
+              <a:t>贖いの主イエスの　偉大な恵み</a:t>
             </a:r>
           </a:p>
         </p:txBody>
@@ -5287,8 +4797,8 @@
         </p:nvSpPr>
         <p:spPr>
           <a:xfrm>
-            <a:off x="594360" y="3529584"/>
-            <a:ext cx="11002975" cy="685800"/>
+            <a:off x="640080" y="3753612"/>
+            <a:ext cx="10911535" cy="365760"/>
           </a:xfrm>
           <a:prstGeom prst="rect">
             <a:avLst/>
@@ -5303,13 +4813,13 @@
           <a:p>
             <a:pPr algn="ctr"/>
             <a:r>
-              <a:rPr sz="4400" b="1" i="0">
-                <a:solidFill>
-                  <a:srgbClr val="FFFFFF"/>
+              <a:rPr sz="2400" b="0" i="1">
+                <a:solidFill>
+                  <a:srgbClr val="AAAAAA"/>
                 </a:solidFill>
                 <a:latin typeface="Arial"/>
               </a:rPr>
-              <a:t>贖いの主イエスの　偉大な恵み</a:t>
+              <a:t>Aganaino Shu Iesuno Idaina Megumi</a:t>
             </a:r>
           </a:p>
         </p:txBody>
@@ -5322,8 +4832,8 @@
         </p:nvSpPr>
         <p:spPr>
           <a:xfrm>
-            <a:off x="594360" y="4251960"/>
-            <a:ext cx="11002975" cy="384048"/>
+            <a:off x="640080" y="4530852"/>
+            <a:ext cx="10911535" cy="310896"/>
           </a:xfrm>
           <a:prstGeom prst="rect">
             <a:avLst/>
@@ -5338,13 +4848,13 @@
           <a:p>
             <a:pPr algn="ctr"/>
             <a:r>
-              <a:rPr sz="2400" b="0" i="1">
-                <a:solidFill>
-                  <a:srgbClr val="B4B4B4"/>
+              <a:rPr sz="2000" b="0" i="1">
+                <a:solidFill>
+                  <a:srgbClr val="828282"/>
                 </a:solidFill>
                 <a:latin typeface="Arial"/>
               </a:rPr>
-              <a:t>Aganaino Shu Iesuno Idaina Megumi</a:t>
+              <a:t>Quão grande é o abismo que jazia entre nós</a:t>
             </a:r>
           </a:p>
         </p:txBody>
@@ -5357,8 +4867,8 @@
         </p:nvSpPr>
         <p:spPr>
           <a:xfrm>
-            <a:off x="594360" y="4672584"/>
-            <a:ext cx="11002975" cy="347472"/>
+            <a:off x="640080" y="4896612"/>
+            <a:ext cx="10911535" cy="310896"/>
           </a:xfrm>
           <a:prstGeom prst="rect">
             <a:avLst/>
@@ -5375,11 +4885,11 @@
             <a:r>
               <a:rPr sz="2000" b="0" i="1">
                 <a:solidFill>
-                  <a:srgbClr val="8C8C8C"/>
+                  <a:srgbClr val="828282"/>
                 </a:solidFill>
                 <a:latin typeface="Arial"/>
               </a:rPr>
-              <a:t/>
+              <a:t>Quão alta a montanha que eu não podia escalar</a:t>
             </a:r>
           </a:p>
         </p:txBody>
@@ -5418,8 +4928,8 @@
         </p:nvSpPr>
         <p:spPr>
           <a:xfrm>
-            <a:off x="594360" y="1837944"/>
-            <a:ext cx="11002975" cy="685800"/>
+            <a:off x="640080" y="1650492"/>
+            <a:ext cx="10911535" cy="731520"/>
           </a:xfrm>
           <a:prstGeom prst="rect">
             <a:avLst/>
@@ -5434,7 +4944,7 @@
           <a:p>
             <a:pPr algn="ctr"/>
             <a:r>
-              <a:rPr sz="4400" b="1" i="0">
+              <a:rPr sz="4800" b="1" i="0">
                 <a:solidFill>
                   <a:srgbClr val="FFFFFF"/>
                 </a:solidFill>
@@ -5453,8 +4963,8 @@
         </p:nvSpPr>
         <p:spPr>
           <a:xfrm>
-            <a:off x="594360" y="2560320"/>
-            <a:ext cx="11002975" cy="384048"/>
+            <a:off x="640080" y="2418588"/>
+            <a:ext cx="10911535" cy="365760"/>
           </a:xfrm>
           <a:prstGeom prst="rect">
             <a:avLst/>
@@ -5471,7 +4981,7 @@
             <a:r>
               <a:rPr sz="2400" b="0" i="1">
                 <a:solidFill>
-                  <a:srgbClr val="B4B4B4"/>
+                  <a:srgbClr val="AAAAAA"/>
                 </a:solidFill>
                 <a:latin typeface="Arial"/>
               </a:rPr>
@@ -5488,8 +4998,8 @@
         </p:nvSpPr>
         <p:spPr>
           <a:xfrm>
-            <a:off x="594360" y="2980944"/>
-            <a:ext cx="11002975" cy="347472"/>
+            <a:off x="640080" y="2985516"/>
+            <a:ext cx="10911535" cy="731520"/>
           </a:xfrm>
           <a:prstGeom prst="rect">
             <a:avLst/>
@@ -5504,13 +5014,13 @@
           <a:p>
             <a:pPr algn="ctr"/>
             <a:r>
-              <a:rPr sz="2000" b="0" i="1">
-                <a:solidFill>
-                  <a:srgbClr val="8C8C8C"/>
+              <a:rPr sz="4800" b="1" i="0">
+                <a:solidFill>
+                  <a:srgbClr val="FFFFFF"/>
                 </a:solidFill>
                 <a:latin typeface="Arial"/>
               </a:rPr>
-              <a:t/>
+              <a:t>永遠に主のものとなる</a:t>
             </a:r>
           </a:p>
         </p:txBody>
@@ -5523,8 +5033,8 @@
         </p:nvSpPr>
         <p:spPr>
           <a:xfrm>
-            <a:off x="594360" y="3529584"/>
-            <a:ext cx="11002975" cy="685800"/>
+            <a:off x="640080" y="3753612"/>
+            <a:ext cx="10911535" cy="365760"/>
           </a:xfrm>
           <a:prstGeom prst="rect">
             <a:avLst/>
@@ -5539,13 +5049,13 @@
           <a:p>
             <a:pPr algn="ctr"/>
             <a:r>
-              <a:rPr sz="4400" b="1" i="0">
-                <a:solidFill>
-                  <a:srgbClr val="FFFFFF"/>
+              <a:rPr sz="2400" b="0" i="1">
+                <a:solidFill>
+                  <a:srgbClr val="AAAAAA"/>
                 </a:solidFill>
                 <a:latin typeface="Arial"/>
               </a:rPr>
-              <a:t>永遠に主のものとなる</a:t>
+              <a:t>Towani Shuno Monoto Naru</a:t>
             </a:r>
           </a:p>
         </p:txBody>
@@ -5558,8 +5068,8 @@
         </p:nvSpPr>
         <p:spPr>
           <a:xfrm>
-            <a:off x="594360" y="4251960"/>
-            <a:ext cx="11002975" cy="384048"/>
+            <a:off x="640080" y="4530852"/>
+            <a:ext cx="10911535" cy="310896"/>
           </a:xfrm>
           <a:prstGeom prst="rect">
             <a:avLst/>
@@ -5574,13 +5084,13 @@
           <a:p>
             <a:pPr algn="ctr"/>
             <a:r>
-              <a:rPr sz="2400" b="0" i="1">
-                <a:solidFill>
-                  <a:srgbClr val="B4B4B4"/>
+              <a:rPr sz="2000" b="0" i="1">
+                <a:solidFill>
+                  <a:srgbClr val="828282"/>
                 </a:solidFill>
                 <a:latin typeface="Arial"/>
               </a:rPr>
-              <a:t>Towani Shuno Monoto Naru</a:t>
+              <a:t>Em desespero, eu virei para o céu</a:t>
             </a:r>
           </a:p>
         </p:txBody>
@@ -5593,8 +5103,8 @@
         </p:nvSpPr>
         <p:spPr>
           <a:xfrm>
-            <a:off x="594360" y="4672584"/>
-            <a:ext cx="11002975" cy="347472"/>
+            <a:off x="640080" y="4896612"/>
+            <a:ext cx="10911535" cy="310896"/>
           </a:xfrm>
           <a:prstGeom prst="rect">
             <a:avLst/>
@@ -5611,11 +5121,11 @@
             <a:r>
               <a:rPr sz="2000" b="0" i="1">
                 <a:solidFill>
-                  <a:srgbClr val="8C8C8C"/>
+                  <a:srgbClr val="828282"/>
                 </a:solidFill>
                 <a:latin typeface="Arial"/>
               </a:rPr>
-              <a:t/>
+              <a:t>E falei Seu nome na noite</a:t>
             </a:r>
           </a:p>
         </p:txBody>
@@ -5654,8 +5164,8 @@
         </p:nvSpPr>
         <p:spPr>
           <a:xfrm>
-            <a:off x="594360" y="2683764"/>
-            <a:ext cx="11002975" cy="685800"/>
+            <a:off x="640080" y="2500884"/>
+            <a:ext cx="10911535" cy="731520"/>
           </a:xfrm>
           <a:prstGeom prst="rect">
             <a:avLst/>
@@ -5670,7 +5180,7 @@
           <a:p>
             <a:pPr algn="ctr"/>
             <a:r>
-              <a:rPr sz="4400" b="1" i="0">
+              <a:rPr sz="4800" b="1" i="0">
                 <a:solidFill>
                   <a:srgbClr val="FFFFFF"/>
                 </a:solidFill>
@@ -5689,8 +5199,8 @@
         </p:nvSpPr>
         <p:spPr>
           <a:xfrm>
-            <a:off x="594360" y="3406140"/>
-            <a:ext cx="11002975" cy="384048"/>
+            <a:off x="640080" y="3268980"/>
+            <a:ext cx="10911535" cy="365760"/>
           </a:xfrm>
           <a:prstGeom prst="rect">
             <a:avLst/>
@@ -5707,7 +5217,7 @@
             <a:r>
               <a:rPr sz="2400" b="0" i="1">
                 <a:solidFill>
-                  <a:srgbClr val="B4B4B4"/>
+                  <a:srgbClr val="AAAAAA"/>
                 </a:solidFill>
                 <a:latin typeface="Arial"/>
               </a:rPr>
@@ -5724,8 +5234,8 @@
         </p:nvSpPr>
         <p:spPr>
           <a:xfrm>
-            <a:off x="594360" y="3826764"/>
-            <a:ext cx="11002975" cy="347472"/>
+            <a:off x="640080" y="4046220"/>
+            <a:ext cx="10911535" cy="310896"/>
           </a:xfrm>
           <a:prstGeom prst="rect">
             <a:avLst/>
@@ -5742,11 +5252,11 @@
             <a:r>
               <a:rPr sz="2000" b="0" i="1">
                 <a:solidFill>
-                  <a:srgbClr val="8C8C8C"/>
+                  <a:srgbClr val="828282"/>
                 </a:solidFill>
                 <a:latin typeface="Arial"/>
               </a:rPr>
-              <a:t/>
+              <a:t>Então através da escuridão, Sua bondade amorosa</a:t>
             </a:r>
           </a:p>
         </p:txBody>
@@ -5785,8 +5295,8 @@
         </p:nvSpPr>
         <p:spPr>
           <a:xfrm>
-            <a:off x="594360" y="2258568"/>
-            <a:ext cx="11002975" cy="685800"/>
+            <a:off x="640080" y="2052828"/>
+            <a:ext cx="10911535" cy="731520"/>
           </a:xfrm>
           <a:prstGeom prst="rect">
             <a:avLst/>
@@ -5801,7 +5311,7 @@
           <a:p>
             <a:pPr algn="ctr"/>
             <a:r>
-              <a:rPr sz="4400" b="1" i="0">
+              <a:rPr sz="4800" b="1" i="0">
                 <a:solidFill>
                   <a:srgbClr val="FFFFFF"/>
                 </a:solidFill>
@@ -5820,8 +5330,8 @@
         </p:nvSpPr>
         <p:spPr>
           <a:xfrm>
-            <a:off x="594360" y="2980944"/>
-            <a:ext cx="11002975" cy="347472"/>
+            <a:off x="640080" y="2985516"/>
+            <a:ext cx="10911535" cy="731520"/>
           </a:xfrm>
           <a:prstGeom prst="rect">
             <a:avLst/>
@@ -5836,13 +5346,13 @@
           <a:p>
             <a:pPr algn="ctr"/>
             <a:r>
-              <a:rPr sz="2200" b="0" i="1">
-                <a:solidFill>
-                  <a:srgbClr val="8C8C8C"/>
+              <a:rPr sz="4500" b="1" i="0">
+                <a:solidFill>
+                  <a:srgbClr val="FFFFFF"/>
                 </a:solidFill>
                 <a:latin typeface="Arial"/>
               </a:rPr>
-              <a:t/>
+              <a:t>Jesus Cristo, minha esperança viva</a:t>
             </a:r>
           </a:p>
         </p:txBody>
@@ -5855,8 +5365,8 @@
         </p:nvSpPr>
         <p:spPr>
           <a:xfrm>
-            <a:off x="594360" y="3529584"/>
-            <a:ext cx="11002975" cy="685800"/>
+            <a:off x="640080" y="4128516"/>
+            <a:ext cx="10911535" cy="310896"/>
           </a:xfrm>
           <a:prstGeom prst="rect">
             <a:avLst/>
@@ -5871,13 +5381,13 @@
           <a:p>
             <a:pPr algn="ctr"/>
             <a:r>
-              <a:rPr sz="4141" b="1" i="0">
-                <a:solidFill>
-                  <a:srgbClr val="FFFFFF"/>
+              <a:rPr sz="2000" b="0" i="0">
+                <a:solidFill>
+                  <a:srgbClr val="828282"/>
                 </a:solidFill>
                 <a:latin typeface="Arial"/>
               </a:rPr>
-              <a:t>Jesus Cristo, minha esperança viva</a:t>
+              <a:t>ハレルヤ 死に打ち勝って</a:t>
             </a:r>
           </a:p>
         </p:txBody>
@@ -5890,8 +5400,8 @@
         </p:nvSpPr>
         <p:spPr>
           <a:xfrm>
-            <a:off x="594360" y="4251960"/>
-            <a:ext cx="11002975" cy="347472"/>
+            <a:off x="640080" y="4494276"/>
+            <a:ext cx="10911535" cy="310896"/>
           </a:xfrm>
           <a:prstGeom prst="rect">
             <a:avLst/>
@@ -5906,13 +5416,13 @@
           <a:p>
             <a:pPr algn="ctr"/>
             <a:r>
-              <a:rPr sz="2200" b="0" i="1">
-                <a:solidFill>
-                  <a:srgbClr val="8C8C8C"/>
+              <a:rPr sz="2000" b="0" i="0">
+                <a:solidFill>
+                  <a:srgbClr val="828282"/>
                 </a:solidFill>
                 <a:latin typeface="Arial"/>
               </a:rPr>
-              <a:t/>
+              <a:t>ハレルヤ 自由与える</a:t>
             </a:r>
           </a:p>
         </p:txBody>
@@ -5951,8 +5461,8 @@
         </p:nvSpPr>
         <p:spPr>
           <a:xfrm>
-            <a:off x="594360" y="2258568"/>
-            <a:ext cx="11002975" cy="685800"/>
+            <a:off x="640080" y="2052828"/>
+            <a:ext cx="10911535" cy="731520"/>
           </a:xfrm>
           <a:prstGeom prst="rect">
             <a:avLst/>
@@ -5967,7 +5477,7 @@
           <a:p>
             <a:pPr algn="ctr"/>
             <a:r>
-              <a:rPr sz="3705" b="1" i="0">
+              <a:rPr sz="4000" b="1" i="0">
                 <a:solidFill>
                   <a:srgbClr val="FFFFFF"/>
                 </a:solidFill>
@@ -5986,8 +5496,8 @@
         </p:nvSpPr>
         <p:spPr>
           <a:xfrm>
-            <a:off x="594360" y="2980944"/>
-            <a:ext cx="11002975" cy="347472"/>
+            <a:off x="640080" y="2985516"/>
+            <a:ext cx="10911535" cy="731520"/>
           </a:xfrm>
           <a:prstGeom prst="rect">
             <a:avLst/>
@@ -6002,13 +5512,13 @@
           <a:p>
             <a:pPr algn="ctr"/>
             <a:r>
-              <a:rPr sz="2200" b="0" i="1">
-                <a:solidFill>
-                  <a:srgbClr val="8C8C8C"/>
+              <a:rPr sz="3200" b="1" i="0">
+                <a:solidFill>
+                  <a:srgbClr val="FFFFFF"/>
                 </a:solidFill>
                 <a:latin typeface="Arial"/>
               </a:rPr>
-              <a:t/>
+              <a:t>Para vestir meu pecado e suportar minha vergonha</a:t>
             </a:r>
           </a:p>
         </p:txBody>
@@ -6021,8 +5531,8 @@
         </p:nvSpPr>
         <p:spPr>
           <a:xfrm>
-            <a:off x="594360" y="3529584"/>
-            <a:ext cx="11002975" cy="685800"/>
+            <a:off x="640080" y="4128516"/>
+            <a:ext cx="10911535" cy="310896"/>
           </a:xfrm>
           <a:prstGeom prst="rect">
             <a:avLst/>
@@ -6037,13 +5547,13 @@
           <a:p>
             <a:pPr algn="ctr"/>
             <a:r>
-              <a:rPr sz="2933" b="1" i="0">
-                <a:solidFill>
-                  <a:srgbClr val="FFFFFF"/>
+              <a:rPr sz="2000" b="0" i="0">
+                <a:solidFill>
+                  <a:srgbClr val="828282"/>
                 </a:solidFill>
                 <a:latin typeface="Arial"/>
               </a:rPr>
-              <a:t>Para vestir meu pecado e suportar minha vergonha</a:t>
+              <a:t>救いの御業 イエスの名にある</a:t>
             </a:r>
           </a:p>
         </p:txBody>
@@ -6056,8 +5566,8 @@
         </p:nvSpPr>
         <p:spPr>
           <a:xfrm>
-            <a:off x="594360" y="4251960"/>
-            <a:ext cx="11002975" cy="347472"/>
+            <a:off x="640080" y="4494276"/>
+            <a:ext cx="10911535" cy="310896"/>
           </a:xfrm>
           <a:prstGeom prst="rect">
             <a:avLst/>
@@ -6072,13 +5582,13 @@
           <a:p>
             <a:pPr algn="ctr"/>
             <a:r>
-              <a:rPr sz="2200" b="0" i="1">
-                <a:solidFill>
-                  <a:srgbClr val="8C8C8C"/>
+              <a:rPr sz="2000" b="0" i="0">
+                <a:solidFill>
+                  <a:srgbClr val="828282"/>
                 </a:solidFill>
                 <a:latin typeface="Arial"/>
               </a:rPr>
-              <a:t/>
+              <a:t>主イエス　我が希望</a:t>
             </a:r>
           </a:p>
         </p:txBody>

--- a/output_pptx/Living_Hope.pptx
+++ b/output_pptx/Living_Hope.pptx
@@ -3182,6 +3182,76 @@
           </a:p>
         </p:txBody>
       </p:sp>
+      <p:sp>
+        <p:nvSpPr>
+          <p:cNvPr id="4" name="TextBox 3"/>
+          <p:cNvSpPr txBox="1"/>
+          <p:nvPr/>
+        </p:nvSpPr>
+        <p:spPr>
+          <a:xfrm>
+            <a:off x="640080" y="4128516"/>
+            <a:ext cx="10911535" cy="310896"/>
+          </a:xfrm>
+          <a:prstGeom prst="rect">
+            <a:avLst/>
+          </a:prstGeom>
+          <a:noFill/>
+        </p:spPr>
+        <p:txBody>
+          <a:bodyPr wrap="square">
+            <a:spAutoFit/>
+          </a:bodyPr>
+          <a:lstStyle/>
+          <a:p>
+            <a:pPr algn="ctr"/>
+            <a:r>
+              <a:rPr sz="2000" b="0" i="0">
+                <a:solidFill>
+                  <a:srgbClr val="828282"/>
+                </a:solidFill>
+                <a:latin typeface="Arial"/>
+              </a:rPr>
+              <a:t>どれほど深い淵が私たちの間にあったのか</a:t>
+            </a:r>
+          </a:p>
+        </p:txBody>
+      </p:sp>
+      <p:sp>
+        <p:nvSpPr>
+          <p:cNvPr id="5" name="TextBox 4"/>
+          <p:cNvSpPr txBox="1"/>
+          <p:nvPr/>
+        </p:nvSpPr>
+        <p:spPr>
+          <a:xfrm>
+            <a:off x="640080" y="4494276"/>
+            <a:ext cx="10911535" cy="310896"/>
+          </a:xfrm>
+          <a:prstGeom prst="rect">
+            <a:avLst/>
+          </a:prstGeom>
+          <a:noFill/>
+        </p:spPr>
+        <p:txBody>
+          <a:bodyPr wrap="square">
+            <a:spAutoFit/>
+          </a:bodyPr>
+          <a:lstStyle/>
+          <a:p>
+            <a:pPr algn="ctr"/>
+            <a:r>
+              <a:rPr sz="2000" b="0" i="0">
+                <a:solidFill>
+                  <a:srgbClr val="828282"/>
+                </a:solidFill>
+                <a:latin typeface="Arial"/>
+              </a:rPr>
+              <a:t>どれほど高い山が私は登ることができなかったのか</a:t>
+            </a:r>
+          </a:p>
+        </p:txBody>
+      </p:sp>
     </p:spTree>
   </p:cSld>
   <p:clrMapOvr>
@@ -3243,6 +3313,41 @@
           </a:p>
         </p:txBody>
       </p:sp>
+      <p:sp>
+        <p:nvSpPr>
+          <p:cNvPr id="3" name="TextBox 2"/>
+          <p:cNvSpPr txBox="1"/>
+          <p:nvPr/>
+        </p:nvSpPr>
+        <p:spPr>
+          <a:xfrm>
+            <a:off x="640080" y="3845052"/>
+            <a:ext cx="10911535" cy="310896"/>
+          </a:xfrm>
+          <a:prstGeom prst="rect">
+            <a:avLst/>
+          </a:prstGeom>
+          <a:noFill/>
+        </p:spPr>
+        <p:txBody>
+          <a:bodyPr wrap="square">
+            <a:spAutoFit/>
+          </a:bodyPr>
+          <a:lstStyle/>
+          <a:p>
+            <a:pPr algn="ctr"/>
+            <a:r>
+              <a:rPr sz="2000" b="0" i="0">
+                <a:solidFill>
+                  <a:srgbClr val="828282"/>
+                </a:solidFill>
+                <a:latin typeface="Arial"/>
+              </a:rPr>
+              <a:t>十字架は語った、私は赦されたと</a:t>
+            </a:r>
+          </a:p>
+        </p:txBody>
+      </p:sp>
     </p:spTree>
   </p:cSld>
   <p:clrMapOvr>
@@ -4213,6 +4318,76 @@
           </a:p>
         </p:txBody>
       </p:sp>
+      <p:sp>
+        <p:nvSpPr>
+          <p:cNvPr id="4" name="TextBox 3"/>
+          <p:cNvSpPr txBox="1"/>
+          <p:nvPr/>
+        </p:nvSpPr>
+        <p:spPr>
+          <a:xfrm>
+            <a:off x="640080" y="4128516"/>
+            <a:ext cx="10911535" cy="310896"/>
+          </a:xfrm>
+          <a:prstGeom prst="rect">
+            <a:avLst/>
+          </a:prstGeom>
+          <a:noFill/>
+        </p:spPr>
+        <p:txBody>
+          <a:bodyPr wrap="square">
+            <a:spAutoFit/>
+          </a:bodyPr>
+          <a:lstStyle/>
+          <a:p>
+            <a:pPr algn="ctr"/>
+            <a:r>
+              <a:rPr sz="2000" b="0" i="0">
+                <a:solidFill>
+                  <a:srgbClr val="828282"/>
+                </a:solidFill>
+                <a:latin typeface="Arial"/>
+              </a:rPr>
+              <a:t>ハレルヤ、死は私の上に支配を失った</a:t>
+            </a:r>
+          </a:p>
+        </p:txBody>
+      </p:sp>
+      <p:sp>
+        <p:nvSpPr>
+          <p:cNvPr id="5" name="TextBox 4"/>
+          <p:cNvSpPr txBox="1"/>
+          <p:nvPr/>
+        </p:nvSpPr>
+        <p:spPr>
+          <a:xfrm>
+            <a:off x="640080" y="4494276"/>
+            <a:ext cx="10911535" cy="310896"/>
+          </a:xfrm>
+          <a:prstGeom prst="rect">
+            <a:avLst/>
+          </a:prstGeom>
+          <a:noFill/>
+        </p:spPr>
+        <p:txBody>
+          <a:bodyPr wrap="square">
+            <a:spAutoFit/>
+          </a:bodyPr>
+          <a:lstStyle/>
+          <a:p>
+            <a:pPr algn="ctr"/>
+            <a:r>
+              <a:rPr sz="2000" b="0" i="0">
+                <a:solidFill>
+                  <a:srgbClr val="828282"/>
+                </a:solidFill>
+                <a:latin typeface="Arial"/>
+              </a:rPr>
+              <a:t>あなたすべての鎖を砕きました</a:t>
+            </a:r>
+          </a:p>
+        </p:txBody>
+      </p:sp>
     </p:spTree>
   </p:cSld>
   <p:clrMapOvr>
@@ -4274,6 +4449,41 @@
           </a:p>
         </p:txBody>
       </p:sp>
+      <p:sp>
+        <p:nvSpPr>
+          <p:cNvPr id="3" name="TextBox 2"/>
+          <p:cNvSpPr txBox="1"/>
+          <p:nvPr/>
+        </p:nvSpPr>
+        <p:spPr>
+          <a:xfrm>
+            <a:off x="640080" y="3845052"/>
+            <a:ext cx="10911535" cy="310896"/>
+          </a:xfrm>
+          <a:prstGeom prst="rect">
+            <a:avLst/>
+          </a:prstGeom>
+          <a:noFill/>
+        </p:spPr>
+        <p:txBody>
+          <a:bodyPr wrap="square">
+            <a:spAutoFit/>
+          </a:bodyPr>
+          <a:lstStyle/>
+          <a:p>
+            <a:pPr algn="ctr"/>
+            <a:r>
+              <a:rPr sz="2000" b="0" i="0">
+                <a:solidFill>
+                  <a:srgbClr val="828282"/>
+                </a:solidFill>
+                <a:latin typeface="Arial"/>
+              </a:rPr>
+              <a:t>あなたの名前に救いがあります</a:t>
+            </a:r>
+          </a:p>
+        </p:txBody>
+      </p:sp>
     </p:spTree>
   </p:cSld>
   <p:clrMapOvr>
@@ -4370,6 +4580,76 @@
           </a:p>
         </p:txBody>
       </p:sp>
+      <p:sp>
+        <p:nvSpPr>
+          <p:cNvPr id="4" name="TextBox 3"/>
+          <p:cNvSpPr txBox="1"/>
+          <p:nvPr/>
+        </p:nvSpPr>
+        <p:spPr>
+          <a:xfrm>
+            <a:off x="640080" y="4128516"/>
+            <a:ext cx="10911535" cy="310896"/>
+          </a:xfrm>
+          <a:prstGeom prst="rect">
+            <a:avLst/>
+          </a:prstGeom>
+          <a:noFill/>
+        </p:spPr>
+        <p:txBody>
+          <a:bodyPr wrap="square">
+            <a:spAutoFit/>
+          </a:bodyPr>
+          <a:lstStyle/>
+          <a:p>
+            <a:pPr algn="ctr"/>
+            <a:r>
+              <a:rPr sz="2000" b="0" i="0">
+                <a:solidFill>
+                  <a:srgbClr val="828282"/>
+                </a:solidFill>
+                <a:latin typeface="Arial"/>
+              </a:rPr>
+              <a:t>イエス・キリスト、私の生きた希望</a:t>
+            </a:r>
+          </a:p>
+        </p:txBody>
+      </p:sp>
+      <p:sp>
+        <p:nvSpPr>
+          <p:cNvPr id="5" name="TextBox 4"/>
+          <p:cNvSpPr txBox="1"/>
+          <p:nvPr/>
+        </p:nvSpPr>
+        <p:spPr>
+          <a:xfrm>
+            <a:off x="640080" y="4494276"/>
+            <a:ext cx="10911535" cy="310896"/>
+          </a:xfrm>
+          <a:prstGeom prst="rect">
+            <a:avLst/>
+          </a:prstGeom>
+          <a:noFill/>
+        </p:spPr>
+        <p:txBody>
+          <a:bodyPr wrap="square">
+            <a:spAutoFit/>
+          </a:bodyPr>
+          <a:lstStyle/>
+          <a:p>
+            <a:pPr algn="ctr"/>
+            <a:r>
+              <a:rPr sz="2000" b="0" i="0">
+                <a:solidFill>
+                  <a:srgbClr val="828282"/>
+                </a:solidFill>
+                <a:latin typeface="Arial"/>
+              </a:rPr>
+              <a:t>それから約束を確かにした朝が来ました</a:t>
+            </a:r>
+          </a:p>
+        </p:txBody>
+      </p:sp>
     </p:spTree>
   </p:cSld>
   <p:clrMapOvr>
@@ -4466,6 +4746,76 @@
           </a:p>
         </p:txBody>
       </p:sp>
+      <p:sp>
+        <p:nvSpPr>
+          <p:cNvPr id="4" name="TextBox 3"/>
+          <p:cNvSpPr txBox="1"/>
+          <p:nvPr/>
+        </p:nvSpPr>
+        <p:spPr>
+          <a:xfrm>
+            <a:off x="640080" y="4128516"/>
+            <a:ext cx="10911535" cy="310896"/>
+          </a:xfrm>
+          <a:prstGeom prst="rect">
+            <a:avLst/>
+          </a:prstGeom>
+          <a:noFill/>
+        </p:spPr>
+        <p:txBody>
+          <a:bodyPr wrap="square">
+            <a:spAutoFit/>
+          </a:bodyPr>
+          <a:lstStyle/>
+          <a:p>
+            <a:pPr algn="ctr"/>
+            <a:r>
+              <a:rPr sz="2000" b="0" i="0">
+                <a:solidFill>
+                  <a:srgbClr val="828282"/>
+                </a:solidFill>
+                <a:latin typeface="Arial"/>
+              </a:rPr>
+              <a:t>絶望の中で、私は天を仰ぎました</a:t>
+            </a:r>
+          </a:p>
+        </p:txBody>
+      </p:sp>
+      <p:sp>
+        <p:nvSpPr>
+          <p:cNvPr id="5" name="TextBox 4"/>
+          <p:cNvSpPr txBox="1"/>
+          <p:nvPr/>
+        </p:nvSpPr>
+        <p:spPr>
+          <a:xfrm>
+            <a:off x="640080" y="4494276"/>
+            <a:ext cx="10911535" cy="310896"/>
+          </a:xfrm>
+          <a:prstGeom prst="rect">
+            <a:avLst/>
+          </a:prstGeom>
+          <a:noFill/>
+        </p:spPr>
+        <p:txBody>
+          <a:bodyPr wrap="square">
+            <a:spAutoFit/>
+          </a:bodyPr>
+          <a:lstStyle/>
+          <a:p>
+            <a:pPr algn="ctr"/>
+            <a:r>
+              <a:rPr sz="2000" b="0" i="0">
+                <a:solidFill>
+                  <a:srgbClr val="828282"/>
+                </a:solidFill>
+                <a:latin typeface="Arial"/>
+              </a:rPr>
+              <a:t>そして夜の中でご自分の名前を呼びました</a:t>
+            </a:r>
+          </a:p>
+        </p:txBody>
+      </p:sp>
     </p:spTree>
   </p:cSld>
   <p:clrMapOvr>
@@ -4562,6 +4912,76 @@
           </a:p>
         </p:txBody>
       </p:sp>
+      <p:sp>
+        <p:nvSpPr>
+          <p:cNvPr id="4" name="TextBox 3"/>
+          <p:cNvSpPr txBox="1"/>
+          <p:nvPr/>
+        </p:nvSpPr>
+        <p:spPr>
+          <a:xfrm>
+            <a:off x="640080" y="4128516"/>
+            <a:ext cx="10911535" cy="310896"/>
+          </a:xfrm>
+          <a:prstGeom prst="rect">
+            <a:avLst/>
+          </a:prstGeom>
+          <a:noFill/>
+        </p:spPr>
+        <p:txBody>
+          <a:bodyPr wrap="square">
+            <a:spAutoFit/>
+          </a:bodyPr>
+          <a:lstStyle/>
+          <a:p>
+            <a:pPr algn="ctr"/>
+            <a:r>
+              <a:rPr sz="2000" b="0" i="0">
+                <a:solidFill>
+                  <a:srgbClr val="828282"/>
+                </a:solidFill>
+                <a:latin typeface="Arial"/>
+              </a:rPr>
+              <a:t>すると暗闇を通して、主の愛する優しさが</a:t>
+            </a:r>
+          </a:p>
+        </p:txBody>
+      </p:sp>
+      <p:sp>
+        <p:nvSpPr>
+          <p:cNvPr id="5" name="TextBox 4"/>
+          <p:cNvSpPr txBox="1"/>
+          <p:nvPr/>
+        </p:nvSpPr>
+        <p:spPr>
+          <a:xfrm>
+            <a:off x="640080" y="4494276"/>
+            <a:ext cx="10911535" cy="310896"/>
+          </a:xfrm>
+          <a:prstGeom prst="rect">
+            <a:avLst/>
+          </a:prstGeom>
+          <a:noFill/>
+        </p:spPr>
+        <p:txBody>
+          <a:bodyPr wrap="square">
+            <a:spAutoFit/>
+          </a:bodyPr>
+          <a:lstStyle/>
+          <a:p>
+            <a:pPr algn="ctr"/>
+            <a:r>
+              <a:rPr sz="2000" b="0" i="0">
+                <a:solidFill>
+                  <a:srgbClr val="828282"/>
+                </a:solidFill>
+                <a:latin typeface="Arial"/>
+              </a:rPr>
+              <a:t>私の魂の影を引き裂きました</a:t>
+            </a:r>
+          </a:p>
+        </p:txBody>
+      </p:sp>
     </p:spTree>
   </p:cSld>
   <p:clrMapOvr>
@@ -4654,6 +5074,76 @@
                 <a:latin typeface="Arial"/>
               </a:rPr>
               <a:t>Jesus Cristo, minha esperança viva</a:t>
+            </a:r>
+          </a:p>
+        </p:txBody>
+      </p:sp>
+      <p:sp>
+        <p:nvSpPr>
+          <p:cNvPr id="4" name="TextBox 3"/>
+          <p:cNvSpPr txBox="1"/>
+          <p:nvPr/>
+        </p:nvSpPr>
+        <p:spPr>
+          <a:xfrm>
+            <a:off x="640080" y="4128516"/>
+            <a:ext cx="10911535" cy="310896"/>
+          </a:xfrm>
+          <a:prstGeom prst="rect">
+            <a:avLst/>
+          </a:prstGeom>
+          <a:noFill/>
+        </p:spPr>
+        <p:txBody>
+          <a:bodyPr wrap="square">
+            <a:spAutoFit/>
+          </a:bodyPr>
+          <a:lstStyle/>
+          <a:p>
+            <a:pPr algn="ctr"/>
+            <a:r>
+              <a:rPr sz="2000" b="0" i="0">
+                <a:solidFill>
+                  <a:srgbClr val="828282"/>
+                </a:solidFill>
+                <a:latin typeface="Arial"/>
+              </a:rPr>
+              <a:t>働きは終わり、終わりは書かれました</a:t>
+            </a:r>
+          </a:p>
+        </p:txBody>
+      </p:sp>
+      <p:sp>
+        <p:nvSpPr>
+          <p:cNvPr id="5" name="TextBox 4"/>
+          <p:cNvSpPr txBox="1"/>
+          <p:nvPr/>
+        </p:nvSpPr>
+        <p:spPr>
+          <a:xfrm>
+            <a:off x="640080" y="4494276"/>
+            <a:ext cx="10911535" cy="310896"/>
+          </a:xfrm>
+          <a:prstGeom prst="rect">
+            <a:avLst/>
+          </a:prstGeom>
+          <a:noFill/>
+        </p:spPr>
+        <p:txBody>
+          <a:bodyPr wrap="square">
+            <a:spAutoFit/>
+          </a:bodyPr>
+          <a:lstStyle/>
+          <a:p>
+            <a:pPr algn="ctr"/>
+            <a:r>
+              <a:rPr sz="2000" b="0" i="0">
+                <a:solidFill>
+                  <a:srgbClr val="828282"/>
+                </a:solidFill>
+                <a:latin typeface="Arial"/>
+              </a:rPr>
+              <a:t>イエス・キリスト、私の生きた希望</a:t>
             </a:r>
           </a:p>
         </p:txBody>
